--- a/decks/riftbrawl/Riftbrawl_Proposal.pptx
+++ b/decks/riftbrawl/Riftbrawl_Proposal.pptx
@@ -685,7 +685,7 @@
           <a:p>
             <a:r>
               <a:rPr lang="en-US" dirty="0"/>
-              <a:t>Riftbrawl Singapore was a mini tournament for top teams attending RQ Singapore. Four teams (DSG, TSS, ASC, CTCG), streamed with co-streams; VODs uploaded roughly five days ago. Per-video view counts should be pulled from YouTube Studio before sending.</a:t>
+              <a:t>Riftbrawl Singapore was a mini tournament for top teams attending RQ Singapore. Four teams (Disguised, The Secret Sauce, Ascension, Challenger TCG), streamed with co-streams; VODs uploaded roughly five days ago. Per-video view counts should be pulled from YouTube Studio before sending.</a:t>
             </a:r>
             <a:endParaRPr lang="en-US" dirty="0"/>
           </a:p>
@@ -1680,8 +1680,8 @@
         </p:nvSpPr>
         <p:spPr>
           <a:xfrm>
-            <a:off x="8938260" y="1485900"/>
-            <a:ext cx="1051560" cy="1051560"/>
+            <a:off x="9011412" y="1485900"/>
+            <a:ext cx="905256" cy="1051560"/>
           </a:xfrm>
           <a:prstGeom prst="rect">
             <a:avLst/>
@@ -1697,24 +1697,24 @@
               <a:buNone/>
             </a:pPr>
             <a:r>
-              <a:rPr lang="en-US" sz="900" dirty="0">
-                <a:solidFill>
-                  <a:srgbClr val="C8AA6E"/>
-                </a:solidFill>
-                <a:latin typeface="Calibri" pitchFamily="34" charset="0"/>
-                <a:ea typeface="Calibri" pitchFamily="34" charset="-122"/>
-                <a:cs typeface="Calibri" pitchFamily="34" charset="-120"/>
-              </a:rPr>
-              <a:t>TEAM A</a:t>
-            </a:r>
-            <a:endParaRPr lang="en-US" sz="900" dirty="0"/>
+              <a:rPr lang="en-US" sz="1300" b="1" dirty="0">
+                <a:solidFill>
+                  <a:srgbClr val="F0C96A"/>
+                </a:solidFill>
+                <a:latin typeface="Calibri" pitchFamily="34" charset="0"/>
+                <a:ea typeface="Calibri" pitchFamily="34" charset="-122"/>
+                <a:cs typeface="Calibri" pitchFamily="34" charset="-120"/>
+              </a:rPr>
+              <a:t>DSG</a:t>
+            </a:r>
+            <a:endParaRPr lang="en-US" sz="1300" dirty="0"/>
           </a:p>
           <a:p>
             <a:pPr algn="ctr" indent="0" marL="0">
               <a:buNone/>
             </a:pPr>
             <a:r>
-              <a:rPr lang="en-US" sz="1050" b="1" dirty="0">
+              <a:rPr lang="en-US" sz="750" dirty="0">
                 <a:solidFill>
                   <a:srgbClr val="F0E6D2"/>
                 </a:solidFill>
@@ -1722,9 +1722,9 @@
                 <a:ea typeface="Calibri" pitchFamily="34" charset="-122"/>
                 <a:cs typeface="Calibri" pitchFamily="34" charset="-120"/>
               </a:rPr>
-              <a:t>3 players</a:t>
-            </a:r>
-            <a:endParaRPr lang="en-US" sz="900" dirty="0"/>
+              <a:t>Disguised</a:t>
+            </a:r>
+            <a:endParaRPr lang="en-US" sz="1300" dirty="0"/>
           </a:p>
         </p:txBody>
       </p:sp>
@@ -1761,8 +1761,8 @@
         </p:nvSpPr>
         <p:spPr>
           <a:xfrm>
-            <a:off x="10355580" y="2903220"/>
-            <a:ext cx="1051560" cy="1051560"/>
+            <a:off x="10428732" y="2903220"/>
+            <a:ext cx="905256" cy="1051560"/>
           </a:xfrm>
           <a:prstGeom prst="rect">
             <a:avLst/>
@@ -1778,24 +1778,24 @@
               <a:buNone/>
             </a:pPr>
             <a:r>
-              <a:rPr lang="en-US" sz="900" dirty="0">
-                <a:solidFill>
-                  <a:srgbClr val="C8AA6E"/>
-                </a:solidFill>
-                <a:latin typeface="Calibri" pitchFamily="34" charset="0"/>
-                <a:ea typeface="Calibri" pitchFamily="34" charset="-122"/>
-                <a:cs typeface="Calibri" pitchFamily="34" charset="-120"/>
-              </a:rPr>
-              <a:t>TEAM B</a:t>
-            </a:r>
-            <a:endParaRPr lang="en-US" sz="900" dirty="0"/>
+              <a:rPr lang="en-US" sz="1300" b="1" dirty="0">
+                <a:solidFill>
+                  <a:srgbClr val="F0C96A"/>
+                </a:solidFill>
+                <a:latin typeface="Calibri" pitchFamily="34" charset="0"/>
+                <a:ea typeface="Calibri" pitchFamily="34" charset="-122"/>
+                <a:cs typeface="Calibri" pitchFamily="34" charset="-120"/>
+              </a:rPr>
+              <a:t>TSS</a:t>
+            </a:r>
+            <a:endParaRPr lang="en-US" sz="1300" dirty="0"/>
           </a:p>
           <a:p>
             <a:pPr algn="ctr" indent="0" marL="0">
               <a:buNone/>
             </a:pPr>
             <a:r>
-              <a:rPr lang="en-US" sz="1050" b="1" dirty="0">
+              <a:rPr lang="en-US" sz="750" dirty="0">
                 <a:solidFill>
                   <a:srgbClr val="F0E6D2"/>
                 </a:solidFill>
@@ -1803,9 +1803,9 @@
                 <a:ea typeface="Calibri" pitchFamily="34" charset="-122"/>
                 <a:cs typeface="Calibri" pitchFamily="34" charset="-120"/>
               </a:rPr>
-              <a:t>3 players</a:t>
-            </a:r>
-            <a:endParaRPr lang="en-US" sz="900" dirty="0"/>
+              <a:t>The Secret Sauce</a:t>
+            </a:r>
+            <a:endParaRPr lang="en-US" sz="1300" dirty="0"/>
           </a:p>
         </p:txBody>
       </p:sp>
@@ -1842,8 +1842,8 @@
         </p:nvSpPr>
         <p:spPr>
           <a:xfrm>
-            <a:off x="8938260" y="4320540"/>
-            <a:ext cx="1051560" cy="1051560"/>
+            <a:off x="9011412" y="4320540"/>
+            <a:ext cx="905256" cy="1051560"/>
           </a:xfrm>
           <a:prstGeom prst="rect">
             <a:avLst/>
@@ -1859,24 +1859,24 @@
               <a:buNone/>
             </a:pPr>
             <a:r>
-              <a:rPr lang="en-US" sz="900" dirty="0">
-                <a:solidFill>
-                  <a:srgbClr val="C8AA6E"/>
-                </a:solidFill>
-                <a:latin typeface="Calibri" pitchFamily="34" charset="0"/>
-                <a:ea typeface="Calibri" pitchFamily="34" charset="-122"/>
-                <a:cs typeface="Calibri" pitchFamily="34" charset="-120"/>
-              </a:rPr>
-              <a:t>TEAM C</a:t>
-            </a:r>
-            <a:endParaRPr lang="en-US" sz="900" dirty="0"/>
+              <a:rPr lang="en-US" sz="1300" b="1" dirty="0">
+                <a:solidFill>
+                  <a:srgbClr val="F0C96A"/>
+                </a:solidFill>
+                <a:latin typeface="Calibri" pitchFamily="34" charset="0"/>
+                <a:ea typeface="Calibri" pitchFamily="34" charset="-122"/>
+                <a:cs typeface="Calibri" pitchFamily="34" charset="-120"/>
+              </a:rPr>
+              <a:t>ASC</a:t>
+            </a:r>
+            <a:endParaRPr lang="en-US" sz="1300" dirty="0"/>
           </a:p>
           <a:p>
             <a:pPr algn="ctr" indent="0" marL="0">
               <a:buNone/>
             </a:pPr>
             <a:r>
-              <a:rPr lang="en-US" sz="1050" b="1" dirty="0">
+              <a:rPr lang="en-US" sz="750" dirty="0">
                 <a:solidFill>
                   <a:srgbClr val="F0E6D2"/>
                 </a:solidFill>
@@ -1884,9 +1884,9 @@
                 <a:ea typeface="Calibri" pitchFamily="34" charset="-122"/>
                 <a:cs typeface="Calibri" pitchFamily="34" charset="-120"/>
               </a:rPr>
-              <a:t>3 players</a:t>
-            </a:r>
-            <a:endParaRPr lang="en-US" sz="900" dirty="0"/>
+              <a:t>Ascension</a:t>
+            </a:r>
+            <a:endParaRPr lang="en-US" sz="1300" dirty="0"/>
           </a:p>
         </p:txBody>
       </p:sp>
@@ -1923,8 +1923,8 @@
         </p:nvSpPr>
         <p:spPr>
           <a:xfrm>
-            <a:off x="7520940" y="2903220"/>
-            <a:ext cx="1051560" cy="1051560"/>
+            <a:off x="7594092" y="2903220"/>
+            <a:ext cx="905256" cy="1051560"/>
           </a:xfrm>
           <a:prstGeom prst="rect">
             <a:avLst/>
@@ -1940,24 +1940,24 @@
               <a:buNone/>
             </a:pPr>
             <a:r>
-              <a:rPr lang="en-US" sz="900" dirty="0">
-                <a:solidFill>
-                  <a:srgbClr val="C8AA6E"/>
-                </a:solidFill>
-                <a:latin typeface="Calibri" pitchFamily="34" charset="0"/>
-                <a:ea typeface="Calibri" pitchFamily="34" charset="-122"/>
-                <a:cs typeface="Calibri" pitchFamily="34" charset="-120"/>
-              </a:rPr>
-              <a:t>TEAM D</a:t>
-            </a:r>
-            <a:endParaRPr lang="en-US" sz="900" dirty="0"/>
+              <a:rPr lang="en-US" sz="1300" b="1" dirty="0">
+                <a:solidFill>
+                  <a:srgbClr val="F0C96A"/>
+                </a:solidFill>
+                <a:latin typeface="Calibri" pitchFamily="34" charset="0"/>
+                <a:ea typeface="Calibri" pitchFamily="34" charset="-122"/>
+                <a:cs typeface="Calibri" pitchFamily="34" charset="-120"/>
+              </a:rPr>
+              <a:t>CTCG</a:t>
+            </a:r>
+            <a:endParaRPr lang="en-US" sz="1300" dirty="0"/>
           </a:p>
           <a:p>
             <a:pPr algn="ctr" indent="0" marL="0">
               <a:buNone/>
             </a:pPr>
             <a:r>
-              <a:rPr lang="en-US" sz="1050" b="1" dirty="0">
+              <a:rPr lang="en-US" sz="750" dirty="0">
                 <a:solidFill>
                   <a:srgbClr val="F0E6D2"/>
                 </a:solidFill>
@@ -1965,9 +1965,9 @@
                 <a:ea typeface="Calibri" pitchFamily="34" charset="-122"/>
                 <a:cs typeface="Calibri" pitchFamily="34" charset="-120"/>
               </a:rPr>
-              <a:t>3 players</a:t>
-            </a:r>
-            <a:endParaRPr lang="en-US" sz="900" dirty="0"/>
+              <a:t>Challenger TCG</a:t>
+            </a:r>
+            <a:endParaRPr lang="en-US" sz="1300" dirty="0"/>
           </a:p>
         </p:txBody>
       </p:sp>
@@ -2397,7 +2397,7 @@
                 <a:ea typeface="Calibri" pitchFamily="34" charset="-122"/>
                 <a:cs typeface="Calibri" pitchFamily="34" charset="-120"/>
               </a:rPr>
-              <a:t>12 invited players in a 3v3v3v3 team brawl. Room to flex to 16 with an alternate per team.</a:t>
+              <a:t>Disguised, The Secret Sauce, Ascension and Challenger TCG in a 3v3v3v3 team brawl. Flexes to 16 with an alternate per team.</a:t>
             </a:r>
             <a:endParaRPr lang="en-US" sz="1250" dirty="0"/>
           </a:p>
@@ -3482,7 +3482,7 @@
         </p:nvSpPr>
         <p:spPr>
           <a:xfrm>
-            <a:off x="594360" y="1828800"/>
+            <a:off x="594360" y="1783080"/>
             <a:ext cx="2377440" cy="777240"/>
           </a:xfrm>
           <a:prstGeom prst="rect">
@@ -3521,7 +3521,7 @@
         </p:nvSpPr>
         <p:spPr>
           <a:xfrm>
-            <a:off x="594360" y="2651760"/>
+            <a:off x="594360" y="2606040"/>
             <a:ext cx="2377440" cy="502920"/>
           </a:xfrm>
           <a:prstGeom prst="rect">
@@ -3546,7 +3546,7 @@
                 <a:ea typeface="Calibri" pitchFamily="34" charset="-122"/>
                 <a:cs typeface="Calibri" pitchFamily="34" charset="-120"/>
               </a:rPr>
-              <a:t>teams: DSG · TSS · ASC · CTCG</a:t>
+              <a:t>invited teams</a:t>
             </a:r>
             <a:endParaRPr lang="en-US" sz="1250" dirty="0"/>
           </a:p>
@@ -3560,7 +3560,7 @@
         </p:nvSpPr>
         <p:spPr>
           <a:xfrm>
-            <a:off x="3154680" y="1828800"/>
+            <a:off x="3154680" y="1783080"/>
             <a:ext cx="2377440" cy="777240"/>
           </a:xfrm>
           <a:prstGeom prst="rect">
@@ -3599,7 +3599,7 @@
         </p:nvSpPr>
         <p:spPr>
           <a:xfrm>
-            <a:off x="3154680" y="2651760"/>
+            <a:off x="3154680" y="2606040"/>
             <a:ext cx="2377440" cy="502920"/>
           </a:xfrm>
           <a:prstGeom prst="rect">
@@ -3638,7 +3638,7 @@
         </p:nvSpPr>
         <p:spPr>
           <a:xfrm>
-            <a:off x="594360" y="3520440"/>
+            <a:off x="594360" y="3154680"/>
             <a:ext cx="2377440" cy="777240"/>
           </a:xfrm>
           <a:prstGeom prst="rect">
@@ -3677,7 +3677,7 @@
         </p:nvSpPr>
         <p:spPr>
           <a:xfrm>
-            <a:off x="594360" y="4343400"/>
+            <a:off x="594360" y="3977640"/>
             <a:ext cx="2377440" cy="502920"/>
           </a:xfrm>
           <a:prstGeom prst="rect">
@@ -3716,7 +3716,7 @@
         </p:nvSpPr>
         <p:spPr>
           <a:xfrm>
-            <a:off x="3154680" y="3520440"/>
+            <a:off x="3154680" y="3154680"/>
             <a:ext cx="2377440" cy="777240"/>
           </a:xfrm>
           <a:prstGeom prst="rect">
@@ -3755,7 +3755,7 @@
         </p:nvSpPr>
         <p:spPr>
           <a:xfrm>
-            <a:off x="3154680" y="4343400"/>
+            <a:off x="3154680" y="3977640"/>
             <a:ext cx="2377440" cy="502920"/>
           </a:xfrm>
           <a:prstGeom prst="rect">
@@ -3789,6 +3789,338 @@
       <p:sp>
         <p:nvSpPr>
           <p:cNvPr id="12" name="Shape 10"/>
+          <p:cNvSpPr/>
+          <p:nvPr/>
+        </p:nvSpPr>
+        <p:spPr>
+          <a:xfrm>
+            <a:off x="594360" y="4572000"/>
+            <a:ext cx="1261872" cy="603504"/>
+          </a:xfrm>
+          <a:prstGeom prst="roundRect">
+            <a:avLst>
+              <a:gd name="adj" fmla="val 15152"/>
+            </a:avLst>
+          </a:prstGeom>
+          <a:solidFill>
+            <a:srgbClr val="1B2E56"/>
+          </a:solidFill>
+          <a:ln w="12700">
+            <a:solidFill>
+              <a:srgbClr val="C8AA6E"/>
+            </a:solidFill>
+            <a:prstDash val="solid"/>
+          </a:ln>
+        </p:spPr>
+      </p:sp>
+      <p:sp>
+        <p:nvSpPr>
+          <p:cNvPr id="13" name="Text 11"/>
+          <p:cNvSpPr txBox="1"/>
+          <p:nvPr/>
+        </p:nvSpPr>
+        <p:spPr>
+          <a:xfrm>
+            <a:off x="594360" y="4572000"/>
+            <a:ext cx="1261872" cy="603504"/>
+          </a:xfrm>
+          <a:prstGeom prst="rect">
+            <a:avLst/>
+          </a:prstGeom>
+          <a:noFill/>
+          <a:ln/>
+        </p:spPr>
+        <p:txBody>
+          <a:bodyPr wrap="square" lIns="0" tIns="0" rIns="0" bIns="0" rtlCol="0" anchor="ctr"/>
+          <a:lstStyle/>
+          <a:p>
+            <a:pPr algn="ctr" indent="0" marL="0">
+              <a:buNone/>
+            </a:pPr>
+            <a:r>
+              <a:rPr lang="en-US" sz="1200" b="1" dirty="0">
+                <a:solidFill>
+                  <a:srgbClr val="F0C96A"/>
+                </a:solidFill>
+                <a:latin typeface="Calibri" pitchFamily="34" charset="0"/>
+                <a:ea typeface="Calibri" pitchFamily="34" charset="-122"/>
+                <a:cs typeface="Calibri" pitchFamily="34" charset="-120"/>
+              </a:rPr>
+              <a:t>DSG</a:t>
+            </a:r>
+            <a:endParaRPr lang="en-US" sz="1200" dirty="0"/>
+          </a:p>
+          <a:p>
+            <a:pPr algn="ctr" indent="0" marL="0">
+              <a:buNone/>
+            </a:pPr>
+            <a:r>
+              <a:rPr lang="en-US" sz="850" dirty="0">
+                <a:solidFill>
+                  <a:srgbClr val="F0E6D2"/>
+                </a:solidFill>
+                <a:latin typeface="Calibri" pitchFamily="34" charset="0"/>
+                <a:ea typeface="Calibri" pitchFamily="34" charset="-122"/>
+                <a:cs typeface="Calibri" pitchFamily="34" charset="-120"/>
+              </a:rPr>
+              <a:t>Disguised</a:t>
+            </a:r>
+            <a:endParaRPr lang="en-US" sz="1200" dirty="0"/>
+          </a:p>
+        </p:txBody>
+      </p:sp>
+      <p:sp>
+        <p:nvSpPr>
+          <p:cNvPr id="14" name="Shape 12"/>
+          <p:cNvSpPr/>
+          <p:nvPr/>
+        </p:nvSpPr>
+        <p:spPr>
+          <a:xfrm>
+            <a:off x="1947672" y="4572000"/>
+            <a:ext cx="1261872" cy="603504"/>
+          </a:xfrm>
+          <a:prstGeom prst="roundRect">
+            <a:avLst>
+              <a:gd name="adj" fmla="val 15152"/>
+            </a:avLst>
+          </a:prstGeom>
+          <a:solidFill>
+            <a:srgbClr val="1B2E56"/>
+          </a:solidFill>
+          <a:ln w="12700">
+            <a:solidFill>
+              <a:srgbClr val="C8AA6E"/>
+            </a:solidFill>
+            <a:prstDash val="solid"/>
+          </a:ln>
+        </p:spPr>
+      </p:sp>
+      <p:sp>
+        <p:nvSpPr>
+          <p:cNvPr id="15" name="Text 13"/>
+          <p:cNvSpPr txBox="1"/>
+          <p:nvPr/>
+        </p:nvSpPr>
+        <p:spPr>
+          <a:xfrm>
+            <a:off x="1947672" y="4572000"/>
+            <a:ext cx="1261872" cy="603504"/>
+          </a:xfrm>
+          <a:prstGeom prst="rect">
+            <a:avLst/>
+          </a:prstGeom>
+          <a:noFill/>
+          <a:ln/>
+        </p:spPr>
+        <p:txBody>
+          <a:bodyPr wrap="square" lIns="0" tIns="0" rIns="0" bIns="0" rtlCol="0" anchor="ctr"/>
+          <a:lstStyle/>
+          <a:p>
+            <a:pPr algn="ctr" indent="0" marL="0">
+              <a:buNone/>
+            </a:pPr>
+            <a:r>
+              <a:rPr lang="en-US" sz="1200" b="1" dirty="0">
+                <a:solidFill>
+                  <a:srgbClr val="F0C96A"/>
+                </a:solidFill>
+                <a:latin typeface="Calibri" pitchFamily="34" charset="0"/>
+                <a:ea typeface="Calibri" pitchFamily="34" charset="-122"/>
+                <a:cs typeface="Calibri" pitchFamily="34" charset="-120"/>
+              </a:rPr>
+              <a:t>TSS</a:t>
+            </a:r>
+            <a:endParaRPr lang="en-US" sz="1200" dirty="0"/>
+          </a:p>
+          <a:p>
+            <a:pPr algn="ctr" indent="0" marL="0">
+              <a:buNone/>
+            </a:pPr>
+            <a:r>
+              <a:rPr lang="en-US" sz="850" dirty="0">
+                <a:solidFill>
+                  <a:srgbClr val="F0E6D2"/>
+                </a:solidFill>
+                <a:latin typeface="Calibri" pitchFamily="34" charset="0"/>
+                <a:ea typeface="Calibri" pitchFamily="34" charset="-122"/>
+                <a:cs typeface="Calibri" pitchFamily="34" charset="-120"/>
+              </a:rPr>
+              <a:t>The Secret Sauce</a:t>
+            </a:r>
+            <a:endParaRPr lang="en-US" sz="1200" dirty="0"/>
+          </a:p>
+        </p:txBody>
+      </p:sp>
+      <p:sp>
+        <p:nvSpPr>
+          <p:cNvPr id="16" name="Shape 14"/>
+          <p:cNvSpPr/>
+          <p:nvPr/>
+        </p:nvSpPr>
+        <p:spPr>
+          <a:xfrm>
+            <a:off x="3300984" y="4572000"/>
+            <a:ext cx="1261872" cy="603504"/>
+          </a:xfrm>
+          <a:prstGeom prst="roundRect">
+            <a:avLst>
+              <a:gd name="adj" fmla="val 15152"/>
+            </a:avLst>
+          </a:prstGeom>
+          <a:solidFill>
+            <a:srgbClr val="1B2E56"/>
+          </a:solidFill>
+          <a:ln w="12700">
+            <a:solidFill>
+              <a:srgbClr val="C8AA6E"/>
+            </a:solidFill>
+            <a:prstDash val="solid"/>
+          </a:ln>
+        </p:spPr>
+      </p:sp>
+      <p:sp>
+        <p:nvSpPr>
+          <p:cNvPr id="17" name="Text 15"/>
+          <p:cNvSpPr txBox="1"/>
+          <p:nvPr/>
+        </p:nvSpPr>
+        <p:spPr>
+          <a:xfrm>
+            <a:off x="3300984" y="4572000"/>
+            <a:ext cx="1261872" cy="603504"/>
+          </a:xfrm>
+          <a:prstGeom prst="rect">
+            <a:avLst/>
+          </a:prstGeom>
+          <a:noFill/>
+          <a:ln/>
+        </p:spPr>
+        <p:txBody>
+          <a:bodyPr wrap="square" lIns="0" tIns="0" rIns="0" bIns="0" rtlCol="0" anchor="ctr"/>
+          <a:lstStyle/>
+          <a:p>
+            <a:pPr algn="ctr" indent="0" marL="0">
+              <a:buNone/>
+            </a:pPr>
+            <a:r>
+              <a:rPr lang="en-US" sz="1200" b="1" dirty="0">
+                <a:solidFill>
+                  <a:srgbClr val="F0C96A"/>
+                </a:solidFill>
+                <a:latin typeface="Calibri" pitchFamily="34" charset="0"/>
+                <a:ea typeface="Calibri" pitchFamily="34" charset="-122"/>
+                <a:cs typeface="Calibri" pitchFamily="34" charset="-120"/>
+              </a:rPr>
+              <a:t>ASC</a:t>
+            </a:r>
+            <a:endParaRPr lang="en-US" sz="1200" dirty="0"/>
+          </a:p>
+          <a:p>
+            <a:pPr algn="ctr" indent="0" marL="0">
+              <a:buNone/>
+            </a:pPr>
+            <a:r>
+              <a:rPr lang="en-US" sz="850" dirty="0">
+                <a:solidFill>
+                  <a:srgbClr val="F0E6D2"/>
+                </a:solidFill>
+                <a:latin typeface="Calibri" pitchFamily="34" charset="0"/>
+                <a:ea typeface="Calibri" pitchFamily="34" charset="-122"/>
+                <a:cs typeface="Calibri" pitchFamily="34" charset="-120"/>
+              </a:rPr>
+              <a:t>Ascension</a:t>
+            </a:r>
+            <a:endParaRPr lang="en-US" sz="1200" dirty="0"/>
+          </a:p>
+        </p:txBody>
+      </p:sp>
+      <p:sp>
+        <p:nvSpPr>
+          <p:cNvPr id="18" name="Shape 16"/>
+          <p:cNvSpPr/>
+          <p:nvPr/>
+        </p:nvSpPr>
+        <p:spPr>
+          <a:xfrm>
+            <a:off x="4654296" y="4572000"/>
+            <a:ext cx="1261872" cy="603504"/>
+          </a:xfrm>
+          <a:prstGeom prst="roundRect">
+            <a:avLst>
+              <a:gd name="adj" fmla="val 15152"/>
+            </a:avLst>
+          </a:prstGeom>
+          <a:solidFill>
+            <a:srgbClr val="1B2E56"/>
+          </a:solidFill>
+          <a:ln w="12700">
+            <a:solidFill>
+              <a:srgbClr val="C8AA6E"/>
+            </a:solidFill>
+            <a:prstDash val="solid"/>
+          </a:ln>
+        </p:spPr>
+      </p:sp>
+      <p:sp>
+        <p:nvSpPr>
+          <p:cNvPr id="19" name="Text 17"/>
+          <p:cNvSpPr txBox="1"/>
+          <p:nvPr/>
+        </p:nvSpPr>
+        <p:spPr>
+          <a:xfrm>
+            <a:off x="4654296" y="4572000"/>
+            <a:ext cx="1261872" cy="603504"/>
+          </a:xfrm>
+          <a:prstGeom prst="rect">
+            <a:avLst/>
+          </a:prstGeom>
+          <a:noFill/>
+          <a:ln/>
+        </p:spPr>
+        <p:txBody>
+          <a:bodyPr wrap="square" lIns="0" tIns="0" rIns="0" bIns="0" rtlCol="0" anchor="ctr"/>
+          <a:lstStyle/>
+          <a:p>
+            <a:pPr algn="ctr" indent="0" marL="0">
+              <a:buNone/>
+            </a:pPr>
+            <a:r>
+              <a:rPr lang="en-US" sz="1200" b="1" dirty="0">
+                <a:solidFill>
+                  <a:srgbClr val="F0C96A"/>
+                </a:solidFill>
+                <a:latin typeface="Calibri" pitchFamily="34" charset="0"/>
+                <a:ea typeface="Calibri" pitchFamily="34" charset="-122"/>
+                <a:cs typeface="Calibri" pitchFamily="34" charset="-120"/>
+              </a:rPr>
+              <a:t>CTCG</a:t>
+            </a:r>
+            <a:endParaRPr lang="en-US" sz="1200" dirty="0"/>
+          </a:p>
+          <a:p>
+            <a:pPr algn="ctr" indent="0" marL="0">
+              <a:buNone/>
+            </a:pPr>
+            <a:r>
+              <a:rPr lang="en-US" sz="850" dirty="0">
+                <a:solidFill>
+                  <a:srgbClr val="F0E6D2"/>
+                </a:solidFill>
+                <a:latin typeface="Calibri" pitchFamily="34" charset="0"/>
+                <a:ea typeface="Calibri" pitchFamily="34" charset="-122"/>
+                <a:cs typeface="Calibri" pitchFamily="34" charset="-120"/>
+              </a:rPr>
+              <a:t>Challenger TCG</a:t>
+            </a:r>
+            <a:endParaRPr lang="en-US" sz="1200" dirty="0"/>
+          </a:p>
+        </p:txBody>
+      </p:sp>
+      <p:sp>
+        <p:nvSpPr>
+          <p:cNvPr id="20" name="Shape 18"/>
           <p:cNvSpPr/>
           <p:nvPr/>
         </p:nvSpPr>
@@ -3822,7 +4154,7 @@
       </p:sp>
       <p:sp>
         <p:nvSpPr>
-          <p:cNvPr id="13" name="Text 11"/>
+          <p:cNvPr id="21" name="Text 19"/>
           <p:cNvSpPr txBox="1"/>
           <p:nvPr/>
         </p:nvSpPr>
@@ -3861,7 +4193,7 @@
       </p:sp>
       <p:pic>
         <p:nvPicPr>
-          <p:cNvPr id="14" name="Image 0" descr="preencoded.png">    </p:cNvPr>
+          <p:cNvPr id="22" name="Image 0" descr="preencoded.png">    </p:cNvPr>
           <p:cNvPicPr>
             <a:picLocks noChangeAspect="1"/>
           </p:cNvPicPr>
@@ -3885,7 +4217,7 @@
       </p:pic>
       <p:sp>
         <p:nvSpPr>
-          <p:cNvPr id="15" name="Text 12"/>
+          <p:cNvPr id="23" name="Text 20"/>
           <p:cNvSpPr txBox="1"/>
           <p:nvPr/>
         </p:nvSpPr>
@@ -3924,7 +4256,7 @@
       </p:sp>
       <p:pic>
         <p:nvPicPr>
-          <p:cNvPr id="16" name="Image 1" descr="preencoded.png">    </p:cNvPr>
+          <p:cNvPr id="24" name="Image 1" descr="preencoded.png">    </p:cNvPr>
           <p:cNvPicPr>
             <a:picLocks noChangeAspect="1"/>
           </p:cNvPicPr>
@@ -3948,7 +4280,7 @@
       </p:pic>
       <p:sp>
         <p:nvSpPr>
-          <p:cNvPr id="17" name="Text 13"/>
+          <p:cNvPr id="25" name="Text 21"/>
           <p:cNvSpPr txBox="1"/>
           <p:nvPr/>
         </p:nvSpPr>
@@ -3987,7 +4319,7 @@
       </p:sp>
       <p:pic>
         <p:nvPicPr>
-          <p:cNvPr id="18" name="Image 2" descr="preencoded.png">    </p:cNvPr>
+          <p:cNvPr id="26" name="Image 2" descr="preencoded.png">    </p:cNvPr>
           <p:cNvPicPr>
             <a:picLocks noChangeAspect="1"/>
           </p:cNvPicPr>
@@ -4011,7 +4343,7 @@
       </p:pic>
       <p:sp>
         <p:nvSpPr>
-          <p:cNvPr id="19" name="Text 14"/>
+          <p:cNvPr id="27" name="Text 22"/>
           <p:cNvSpPr txBox="1"/>
           <p:nvPr/>
         </p:nvSpPr>
@@ -4050,7 +4382,7 @@
       </p:sp>
       <p:pic>
         <p:nvPicPr>
-          <p:cNvPr id="20" name="Image 3" descr="preencoded.png">    </p:cNvPr>
+          <p:cNvPr id="28" name="Image 3" descr="preencoded.png">    </p:cNvPr>
           <p:cNvPicPr>
             <a:picLocks noChangeAspect="1"/>
           </p:cNvPicPr>
@@ -4074,7 +4406,7 @@
       </p:pic>
       <p:sp>
         <p:nvSpPr>
-          <p:cNvPr id="21" name="Text 15"/>
+          <p:cNvPr id="29" name="Text 23"/>
           <p:cNvSpPr txBox="1"/>
           <p:nvPr/>
         </p:nvSpPr>
@@ -4113,7 +4445,7 @@
       </p:sp>
       <p:pic>
         <p:nvPicPr>
-          <p:cNvPr id="22" name="Image 4" descr="preencoded.png">    </p:cNvPr>
+          <p:cNvPr id="30" name="Image 4" descr="preencoded.png">    </p:cNvPr>
           <p:cNvPicPr>
             <a:picLocks noChangeAspect="1"/>
           </p:cNvPicPr>
@@ -4137,7 +4469,7 @@
       </p:pic>
       <p:sp>
         <p:nvSpPr>
-          <p:cNvPr id="23" name="Text 16"/>
+          <p:cNvPr id="31" name="Text 24"/>
           <p:cNvSpPr txBox="1"/>
           <p:nvPr/>
         </p:nvSpPr>
@@ -4176,14 +4508,14 @@
       </p:sp>
       <p:sp>
         <p:nvSpPr>
-          <p:cNvPr id="24" name="Text 17"/>
-          <p:cNvSpPr txBox="1"/>
-          <p:nvPr/>
-        </p:nvSpPr>
-        <p:spPr>
-          <a:xfrm>
-            <a:off x="594360" y="5120640"/>
-            <a:ext cx="5303520" cy="868680"/>
+          <p:cNvPr id="32" name="Text 25"/>
+          <p:cNvSpPr txBox="1"/>
+          <p:nvPr/>
+        </p:nvSpPr>
+        <p:spPr>
+          <a:xfrm>
+            <a:off x="594360" y="5349240"/>
+            <a:ext cx="5303520" cy="777240"/>
           </a:xfrm>
           <a:prstGeom prst="rect">
             <a:avLst/>
@@ -4199,7 +4531,7 @@
               <a:buNone/>
             </a:pPr>
             <a:r>
-              <a:rPr lang="en-US" sz="1300" i="1" dirty="0">
+              <a:rPr lang="en-US" sz="1250" i="1" dirty="0">
                 <a:solidFill>
                   <a:srgbClr val="F0C96A"/>
                 </a:solidFill>
@@ -4209,13 +4541,13 @@
               </a:rPr>
               <a:t>Takeaway: the format works on a live stage, the teams showed up, and the VODs are on YouTube now. Next: do it with proper prize support and a Friday slot.</a:t>
             </a:r>
-            <a:endParaRPr lang="en-US" sz="1300" dirty="0"/>
-          </a:p>
-        </p:txBody>
-      </p:sp>
-      <p:sp>
-        <p:nvSpPr>
-          <p:cNvPr id="25" name="Text 18"/>
+            <a:endParaRPr lang="en-US" sz="1250" dirty="0"/>
+          </a:p>
+        </p:txBody>
+      </p:sp>
+      <p:sp>
+        <p:nvSpPr>
+          <p:cNvPr id="33" name="Text 26"/>
           <p:cNvSpPr txBox="1"/>
           <p:nvPr/>
         </p:nvSpPr>
@@ -4254,7 +4586,7 @@
       </p:sp>
       <p:sp>
         <p:nvSpPr>
-          <p:cNvPr id="26" name="Text 19"/>
+          <p:cNvPr id="34" name="Text 27"/>
           <p:cNvSpPr txBox="1"/>
           <p:nvPr/>
         </p:nvSpPr>
@@ -9799,7 +10131,7 @@
                 <a:ea typeface="Calibri" pitchFamily="34" charset="-122"/>
                 <a:cs typeface="Calibri" pitchFamily="34" charset="-120"/>
               </a:rPr>
-              <a:t>We invite the four teams and publish the schedule</a:t>
+              <a:t>Confirm the teams: Disguised, The Secret Sauce, Ascension, Challenger TCG</a:t>
             </a:r>
             <a:endParaRPr lang="en-US" sz="1250" dirty="0"/>
           </a:p>
